--- a/Code/Presentation/Presentation_template.pptx
+++ b/Code/Presentation/Presentation_template.pptx
@@ -20299,10 +20299,10 @@
       </p:sp>
       <p:pic>
         <p:nvPicPr>
-          <p:cNvPr id="17" name="Picture 16">
+          <p:cNvPr id="10" name="Picture 9">
             <a:extLst>
               <a:ext uri="{FF2B5EF4-FFF2-40B4-BE49-F238E27FC236}">
-                <a16:creationId xmlns:a16="http://schemas.microsoft.com/office/drawing/2014/main" id="{14AE6381-13F9-DABE-BA0F-C76F78E91FF3}"/>
+                <a16:creationId xmlns:a16="http://schemas.microsoft.com/office/drawing/2014/main" id="{BF38140D-8208-FAE4-F214-800AA51F5242}"/>
               </a:ext>
             </a:extLst>
           </p:cNvPr>
@@ -20721,10 +20721,10 @@
       </p:sp>
       <p:pic>
         <p:nvPicPr>
-          <p:cNvPr id="23" name="Picture 22">
+          <p:cNvPr id="27" name="Picture 26">
             <a:extLst>
               <a:ext uri="{FF2B5EF4-FFF2-40B4-BE49-F238E27FC236}">
-                <a16:creationId xmlns:a16="http://schemas.microsoft.com/office/drawing/2014/main" id="{98813937-16C5-E884-1C02-8F0D29C1DB0C}"/>
+                <a16:creationId xmlns:a16="http://schemas.microsoft.com/office/drawing/2014/main" id="{9D6F81C5-CE36-E091-A8AD-3A33C893EB46}"/>
               </a:ext>
             </a:extLst>
           </p:cNvPr>
@@ -20741,7 +20741,7 @@
         </p:blipFill>
         <p:spPr>
           <a:xfrm>
-            <a:off x="939971" y="1101511"/>
+            <a:off x="881118" y="1115043"/>
             <a:ext cx="7380000" cy="3926159"/>
           </a:xfrm>
           <a:prstGeom prst="rect">
